--- a/docs/발표자료_StudyPace.pptx
+++ b/docs/발표자료_StudyPace.pptx
@@ -125,26 +125,26 @@
   <p:extLst>
     <p:ext uri="{521415D9-36F7-43E2-AB2F-B90AF26B5E84}">
       <p14:sectionLst xmlns:p14="http://schemas.microsoft.com/office/powerpoint/2010/main">
-        <p14:section name="시작" id="{45be1d58-1a23-1766-bf59-5852a4ec2104}">
+        <p14:section name="시작" id="{bf7ce8b7-ebf0-45e1-947a-7556bbcea6df}">
           <p14:sldIdLst>
             <p14:sldId id="256"/>
             <p14:sldId id="257"/>
           </p14:sldIdLst>
         </p14:section>
-        <p14:section name="문제 정의" id="{5150fb52-f0f6-2194-bb24-dd83cf1c804c}">
+        <p14:section name="문제 정의" id="{70c6c677-1a0a-4ac7-3ae5-bbe305bfc9d5}">
           <p14:sldIdLst>
             <p14:sldId id="258"/>
             <p14:sldId id="259"/>
             <p14:sldId id="260"/>
           </p14:sldIdLst>
         </p14:section>
-        <p14:section name="해결 방법" id="{606d9564-ea8c-0fd6-9d50-a47fca4eba91}">
+        <p14:section name="해결 방법" id="{7f8545e6-d737-45c3-5af0-cbe11c83d757}">
           <p14:sldIdLst>
             <p14:sldId id="261"/>
             <p14:sldId id="262"/>
           </p14:sldIdLst>
         </p14:section>
-        <p14:section name="AI 활용" id="{82d49cbf-6c62-a96c-42e9-cff1e85d9b34}">
+        <p14:section name="AI 활용" id="{edcb30e1-8647-3eea-2b0f-329651b41888}">
           <p14:sldIdLst>
             <p14:sldId id="263"/>
             <p14:sldId id="264"/>
@@ -153,20 +153,20 @@
             <p14:sldId id="267"/>
           </p14:sldIdLst>
         </p14:section>
-        <p14:section name="기술 · 과정" id="{34c720a1-1612-e39d-b26f-d74a9997ea77}">
+        <p14:section name="기술 · 과정" id="{4d62f6aa-a281-e97d-c63b-88fd260ade8f}">
           <p14:sldIdLst>
             <p14:sldId id="268"/>
             <p14:sldId id="269"/>
           </p14:sldIdLst>
         </p14:section>
-        <p14:section name="피드백 · 개선" id="{26164059-4182-072e-15c4-4070f571ab81}">
+        <p14:section name="피드백 · 개선" id="{d97871fc-6072-b28f-4842-4950e6994bd9}">
           <p14:sldIdLst>
             <p14:sldId id="270"/>
             <p14:sldId id="271"/>
             <p14:sldId id="272"/>
           </p14:sldIdLst>
         </p14:section>
-        <p14:section name="마무리" id="{3eccf70e-041a-a6b9-ad38-d1127c05e343}">
+        <p14:section name="마무리" id="{37752487-4aac-2bb3-0b6a-ffa70b118f12}">
           <p14:sldIdLst>
             <p14:sldId id="273"/>
             <p14:sldId id="274"/>
@@ -8096,7 +8096,7 @@
                 <a:ea typeface="Malgun Gothic" pitchFamily="34" charset="-122"/>
                 <a:cs typeface="Malgun Gothic" pitchFamily="34" charset="-120"/>
               </a:rPr>
-              <a:t>자격증 · 공모전을 준비 중인 대학생 · 취준생 5명</a:t>
+              <a:t>컴퓨터공학과 학생 5명 — 정보처리기사 3명 · SQLD 2명</a:t>
             </a:r>
             <a:endParaRPr lang="ko-KR" sz="1100" dirty="0"/>
           </a:p>

--- a/docs/발표자료_StudyPace.pptx
+++ b/docs/발표자료_StudyPace.pptx
@@ -125,26 +125,26 @@
   <p:extLst>
     <p:ext uri="{521415D9-36F7-43E2-AB2F-B90AF26B5E84}">
       <p14:sectionLst xmlns:p14="http://schemas.microsoft.com/office/powerpoint/2010/main">
-        <p14:section name="시작" id="{bf7ce8b7-ebf0-45e1-947a-7556bbcea6df}">
+        <p14:section name="시작" id="{877ea6a0-4018-7b99-1cb1-d94278cc1942}">
           <p14:sldIdLst>
             <p14:sldId id="256"/>
             <p14:sldId id="257"/>
           </p14:sldIdLst>
         </p14:section>
-        <p14:section name="문제 정의" id="{70c6c677-1a0a-4ac7-3ae5-bbe305bfc9d5}">
+        <p14:section name="문제 정의" id="{0e061fe3-e7d1-6bbb-3ff5-b0ec19d485b5}">
           <p14:sldIdLst>
             <p14:sldId id="258"/>
             <p14:sldId id="259"/>
             <p14:sldId id="260"/>
           </p14:sldIdLst>
         </p14:section>
-        <p14:section name="해결 방법" id="{7f8545e6-d737-45c3-5af0-cbe11c83d757}">
+        <p14:section name="해결 방법" id="{64bc0871-6f19-3468-1c08-bfd842dd8a5f}">
           <p14:sldIdLst>
             <p14:sldId id="261"/>
             <p14:sldId id="262"/>
           </p14:sldIdLst>
         </p14:section>
-        <p14:section name="AI 활용" id="{edcb30e1-8647-3eea-2b0f-329651b41888}">
+        <p14:section name="AI 활용" id="{b26c7517-3526-295e-3f6d-357f4a2ccd69}">
           <p14:sldIdLst>
             <p14:sldId id="263"/>
             <p14:sldId id="264"/>
@@ -153,20 +153,20 @@
             <p14:sldId id="267"/>
           </p14:sldIdLst>
         </p14:section>
-        <p14:section name="기술 · 과정" id="{4d62f6aa-a281-e97d-c63b-88fd260ade8f}">
+        <p14:section name="기술 · 과정" id="{d26d5240-41b7-e3c4-6c72-9095e61b0d1e}">
           <p14:sldIdLst>
             <p14:sldId id="268"/>
             <p14:sldId id="269"/>
           </p14:sldIdLst>
         </p14:section>
-        <p14:section name="피드백 · 개선" id="{d97871fc-6072-b28f-4842-4950e6994bd9}">
+        <p14:section name="피드백 · 개선" id="{dfb49afa-d48e-45fc-3c45-6d974e909555}">
           <p14:sldIdLst>
             <p14:sldId id="270"/>
             <p14:sldId id="271"/>
             <p14:sldId id="272"/>
           </p14:sldIdLst>
         </p14:section>
-        <p14:section name="마무리" id="{37752487-4aac-2bb3-0b6a-ffa70b118f12}">
+        <p14:section name="마무리" id="{aa207ab0-8f9a-bb47-d91e-4fc905609993}">
           <p14:sldIdLst>
             <p14:sldId id="273"/>
             <p14:sldId id="274"/>
@@ -8867,7 +8867,7 @@
                 <a:ea typeface="Malgun Gothic" pitchFamily="34" charset="-122"/>
                 <a:cs typeface="Malgun Gothic" pitchFamily="34" charset="-120"/>
               </a:rPr>
-              <a:t>학습 화면에 「이 블록 공부 방법」 — 단원 유형(개념 · 문제 · 기출 · 오답 · 복습 · 공모전)별 3단계 할 일과 시간 배분</a:t>
+              <a:t>학습 화면에 「이 블록 공부 방법」 — AI 가 블록마다 3단계 할 일과 시간 배분. 같은 단원의 1/3 · 2/3 · 3/3 은 이어지게 (못 쓰면 규칙 안내)</a:t>
             </a:r>
             <a:endParaRPr lang="ko-KR" sz="1000" dirty="0"/>
           </a:p>
@@ -18506,6 +18506,27 @@
                 <a:cs typeface="Malgun Gothic" pitchFamily="34" charset="-120"/>
               </a:rPr>
               <a:t>추천 이유 문장 — 검색된 근거로만</a:t>
+            </a:r>
+            <a:endParaRPr lang="ko-KR" sz="1200" dirty="0"/>
+          </a:p>
+          <a:p>
+            <a:pPr eaLnBrk="0" marL="152400" indent="-152400">
+              <a:spcAft>
+                <a:spcPts val="400"/>
+              </a:spcAft>
+              <a:buSzPct val="100000"/>
+              <a:buChar char="•"/>
+            </a:pPr>
+            <a:r>
+              <a:rPr lang="ko-KR" sz="1200" dirty="0">
+                <a:solidFill>
+                  <a:schemeClr val="tx1"/>
+                </a:solidFill>
+                <a:latin typeface="Malgun Gothic" pitchFamily="34" charset="0"/>
+                <a:ea typeface="Malgun Gothic" pitchFamily="34" charset="-122"/>
+                <a:cs typeface="Malgun Gothic" pitchFamily="34" charset="-120"/>
+              </a:rPr>
+              <a:t>블록 공부 방법 — 블록마다 할 일 3단계</a:t>
             </a:r>
             <a:endParaRPr lang="ko-KR" sz="1200" dirty="0"/>
           </a:p>

--- a/docs/발표자료_StudyPace.pptx
+++ b/docs/발표자료_StudyPace.pptx
@@ -125,26 +125,26 @@
   <p:extLst>
     <p:ext uri="{521415D9-36F7-43E2-AB2F-B90AF26B5E84}">
       <p14:sectionLst xmlns:p14="http://schemas.microsoft.com/office/powerpoint/2010/main">
-        <p14:section name="시작" id="{877ea6a0-4018-7b99-1cb1-d94278cc1942}">
+        <p14:section name="시작" id="{4301d3f1-abab-b837-2315-3dd7818fae64}">
           <p14:sldIdLst>
             <p14:sldId id="256"/>
             <p14:sldId id="257"/>
           </p14:sldIdLst>
         </p14:section>
-        <p14:section name="문제 정의" id="{0e061fe3-e7d1-6bbb-3ff5-b0ec19d485b5}">
+        <p14:section name="문제 정의" id="{6dfcd440-dd9c-c476-8181-f9d4d1a6952c}">
           <p14:sldIdLst>
             <p14:sldId id="258"/>
             <p14:sldId id="259"/>
             <p14:sldId id="260"/>
           </p14:sldIdLst>
         </p14:section>
-        <p14:section name="해결 방법" id="{64bc0871-6f19-3468-1c08-bfd842dd8a5f}">
+        <p14:section name="해결 방법" id="{c0ac8c7d-f305-618c-a5e5-c9df5198bf23}">
           <p14:sldIdLst>
             <p14:sldId id="261"/>
             <p14:sldId id="262"/>
           </p14:sldIdLst>
         </p14:section>
-        <p14:section name="AI 활용" id="{b26c7517-3526-295e-3f6d-357f4a2ccd69}">
+        <p14:section name="AI 활용" id="{40e5b748-60a0-770a-2196-9bdb57fc4c68}">
           <p14:sldIdLst>
             <p14:sldId id="263"/>
             <p14:sldId id="264"/>
@@ -153,20 +153,20 @@
             <p14:sldId id="267"/>
           </p14:sldIdLst>
         </p14:section>
-        <p14:section name="기술 · 과정" id="{d26d5240-41b7-e3c4-6c72-9095e61b0d1e}">
+        <p14:section name="기술 · 과정" id="{18de7665-f346-cea9-26f6-2472e24f55b5}">
           <p14:sldIdLst>
             <p14:sldId id="268"/>
             <p14:sldId id="269"/>
           </p14:sldIdLst>
         </p14:section>
-        <p14:section name="피드백 · 개선" id="{dfb49afa-d48e-45fc-3c45-6d974e909555}">
+        <p14:section name="피드백 · 개선" id="{1b12633e-3f34-0d2e-cc32-c3b52999aacd}">
           <p14:sldIdLst>
             <p14:sldId id="270"/>
             <p14:sldId id="271"/>
             <p14:sldId id="272"/>
           </p14:sldIdLst>
         </p14:section>
-        <p14:section name="마무리" id="{aa207ab0-8f9a-bb47-d91e-4fc905609993}">
+        <p14:section name="마무리" id="{1c7b044b-bfce-813a-9848-0b458ecdc248}">
           <p14:sldIdLst>
             <p14:sldId id="273"/>
             <p14:sldId id="274"/>
@@ -7904,7 +7904,7 @@
                 <a:ea typeface="Malgun Gothic" pitchFamily="34" charset="-122"/>
                 <a:cs typeface="Malgun Gothic" pitchFamily="34" charset="-120"/>
               </a:rPr>
-              <a:t>/health/ready(DB 실제 읽기) · 15분 외부 점검 · 헬스체크 통과한 배포만 트래픽</a:t>
+              <a:t>/health/ready(DB 실제 읽기) · 정기 외부 점검 · 헬스체크 통과한 배포만 트래픽</a:t>
             </a:r>
             <a:endParaRPr lang="ko-KR" sz="1000" dirty="0"/>
           </a:p>
@@ -9765,7 +9765,7 @@
                 <a:ea typeface="Malgun Gothic" pitchFamily="34" charset="-122"/>
                 <a:cs typeface="Malgun Gothic" pitchFamily="34" charset="-120"/>
               </a:rPr>
-              <a:t>15분마다 GitHub Actions 가 프론트 · DB 읽기 · 공고 API · 알림 워커를 점검. 실패하면 장애 이슈를 열고 복구되면 시간을 적고 닫는다</a:t>
+              <a:t>GitHub Actions 가 정기적으로 프론트 · DB 읽기 · 공고 API · 알림 워커를 점검 — 10-07~12 25회 모두 정상(가동률 100%), 서버 오류 0건. 실패하면 장애 이슈를 자동으로 연다</a:t>
             </a:r>
             <a:endParaRPr lang="ko-KR" sz="1100" dirty="0"/>
           </a:p>
@@ -11949,7 +11949,7 @@
                 <a:ea typeface="Malgun Gothic" pitchFamily="34" charset="-122"/>
                 <a:cs typeface="Malgun Gothic" pitchFamily="34" charset="-120"/>
               </a:rPr>
-              <a:t>매일 밤 재조정 · 알림 · 15분 외부 점검까지 자동</a:t>
+              <a:t>매일 밤 재조정 · 알림 · 정기 외부 점검까지 자동</a:t>
             </a:r>
             <a:endParaRPr lang="ko-KR" sz="1200" dirty="0"/>
           </a:p>

--- a/docs/발표자료_StudyPace.pptx
+++ b/docs/발표자료_StudyPace.pptx
@@ -125,26 +125,26 @@
   <p:extLst>
     <p:ext uri="{521415D9-36F7-43E2-AB2F-B90AF26B5E84}">
       <p14:sectionLst xmlns:p14="http://schemas.microsoft.com/office/powerpoint/2010/main">
-        <p14:section name="시작" id="{4301d3f1-abab-b837-2315-3dd7818fae64}">
+        <p14:section name="시작" id="{8831fae2-f8f6-0cc9-ffea-52dc7e9218ff}">
           <p14:sldIdLst>
             <p14:sldId id="256"/>
             <p14:sldId id="257"/>
           </p14:sldIdLst>
         </p14:section>
-        <p14:section name="문제 정의" id="{6dfcd440-dd9c-c476-8181-f9d4d1a6952c}">
+        <p14:section name="문제 정의" id="{a6dbb9ea-cb92-1536-ac4b-5214ff739b9f}">
           <p14:sldIdLst>
             <p14:sldId id="258"/>
             <p14:sldId id="259"/>
             <p14:sldId id="260"/>
           </p14:sldIdLst>
         </p14:section>
-        <p14:section name="해결 방법" id="{c0ac8c7d-f305-618c-a5e5-c9df5198bf23}">
+        <p14:section name="해결 방법" id="{afbe936f-af7e-962f-9977-9e79e9bd723e}">
           <p14:sldIdLst>
             <p14:sldId id="261"/>
             <p14:sldId id="262"/>
           </p14:sldIdLst>
         </p14:section>
-        <p14:section name="AI 활용" id="{40e5b748-60a0-770a-2196-9bdb57fc4c68}">
+        <p14:section name="AI 활용" id="{ad6e1d21-a147-8b72-459f-dc6fc082ca7e}">
           <p14:sldIdLst>
             <p14:sldId id="263"/>
             <p14:sldId id="264"/>
@@ -153,20 +153,20 @@
             <p14:sldId id="267"/>
           </p14:sldIdLst>
         </p14:section>
-        <p14:section name="기술 · 과정" id="{18de7665-f346-cea9-26f6-2472e24f55b5}">
+        <p14:section name="기술 · 과정" id="{abd91cbd-5ed3-bcdc-7186-275db82ae28a}">
           <p14:sldIdLst>
             <p14:sldId id="268"/>
             <p14:sldId id="269"/>
           </p14:sldIdLst>
         </p14:section>
-        <p14:section name="피드백 · 개선" id="{1b12633e-3f34-0d2e-cc32-c3b52999aacd}">
+        <p14:section name="피드백 · 개선" id="{3863d3c2-df41-65fb-8a30-9cff8c830be8}">
           <p14:sldIdLst>
             <p14:sldId id="270"/>
             <p14:sldId id="271"/>
             <p14:sldId id="272"/>
           </p14:sldIdLst>
         </p14:section>
-        <p14:section name="마무리" id="{1c7b044b-bfce-813a-9848-0b458ecdc248}">
+        <p14:section name="마무리" id="{f654f706-20f6-43b7-140a-fc1c58c3b42d}">
           <p14:sldIdLst>
             <p14:sldId id="273"/>
             <p14:sldId id="274"/>
@@ -12802,7 +12802,7 @@
                 <a:ea typeface="Malgun Gothic" pitchFamily="34" charset="-122"/>
                 <a:cs typeface="Malgun Gothic" pitchFamily="34" charset="-120"/>
               </a:rPr>
-              <a:t>정답셋 AI 평가 · 점검 12회 · 백엔드 테스트 536개 · 실사용자 5명 설문과 반영</a:t>
+              <a:t>정답셋 AI 평가 · 점검 12회 · 백엔드 테스트 546개 · 실사용자 5명 설문과 반영</a:t>
             </a:r>
             <a:endParaRPr lang="ko-KR" sz="1200" dirty="0"/>
           </a:p>

--- a/docs/발표자료_StudyPace.pptx
+++ b/docs/발표자료_StudyPace.pptx
@@ -125,26 +125,26 @@
   <p:extLst>
     <p:ext uri="{521415D9-36F7-43E2-AB2F-B90AF26B5E84}">
       <p14:sectionLst xmlns:p14="http://schemas.microsoft.com/office/powerpoint/2010/main">
-        <p14:section name="시작" id="{8831fae2-f8f6-0cc9-ffea-52dc7e9218ff}">
+        <p14:section name="시작" id="{3f905584-825d-2406-1c52-5de79e05c2e6}">
           <p14:sldIdLst>
             <p14:sldId id="256"/>
             <p14:sldId id="257"/>
           </p14:sldIdLst>
         </p14:section>
-        <p14:section name="문제 정의" id="{a6dbb9ea-cb92-1536-ac4b-5214ff739b9f}">
+        <p14:section name="문제 정의" id="{6983ead2-4ba1-7413-48c9-15725bf0314e}">
           <p14:sldIdLst>
             <p14:sldId id="258"/>
             <p14:sldId id="259"/>
             <p14:sldId id="260"/>
           </p14:sldIdLst>
         </p14:section>
-        <p14:section name="해결 방법" id="{afbe936f-af7e-962f-9977-9e79e9bd723e}">
+        <p14:section name="해결 방법" id="{a8085e0d-45c8-0b81-3cb2-2f11e165b8b1}">
           <p14:sldIdLst>
             <p14:sldId id="261"/>
             <p14:sldId id="262"/>
           </p14:sldIdLst>
         </p14:section>
-        <p14:section name="AI 활용" id="{ad6e1d21-a147-8b72-459f-dc6fc082ca7e}">
+        <p14:section name="AI 활용" id="{cdf57f3f-09e7-86d4-dfd0-2d90e81b4d35}">
           <p14:sldIdLst>
             <p14:sldId id="263"/>
             <p14:sldId id="264"/>
@@ -153,20 +153,20 @@
             <p14:sldId id="267"/>
           </p14:sldIdLst>
         </p14:section>
-        <p14:section name="기술 · 과정" id="{abd91cbd-5ed3-bcdc-7186-275db82ae28a}">
+        <p14:section name="기술 · 과정" id="{cdc149f3-430c-bcbb-4daf-2b873dc4224e}">
           <p14:sldIdLst>
             <p14:sldId id="268"/>
             <p14:sldId id="269"/>
           </p14:sldIdLst>
         </p14:section>
-        <p14:section name="피드백 · 개선" id="{3863d3c2-df41-65fb-8a30-9cff8c830be8}">
+        <p14:section name="피드백 · 개선" id="{bed62312-5d17-984a-b676-38f33d13b294}">
           <p14:sldIdLst>
             <p14:sldId id="270"/>
             <p14:sldId id="271"/>
             <p14:sldId id="272"/>
           </p14:sldIdLst>
         </p14:section>
-        <p14:section name="마무리" id="{f654f706-20f6-43b7-140a-fc1c58c3b42d}">
+        <p14:section name="마무리" id="{9b7b02b8-f93a-4644-2358-edd9237d79ea}">
           <p14:sldIdLst>
             <p14:sldId id="273"/>
             <p14:sldId id="274"/>
@@ -320,7 +320,7 @@
               <c:strCache>
                 <c:ptCount val="1"/>
                 <c:pt idx="0">
-                  <c:v>측정 (10-01, 3차)</c:v>
+                  <c:v>측정 (3차 10-01 · 4차 10-12 동일)</c:v>
                 </c:pt>
               </c:strCache>
             </c:strRef>

--- a/docs/발표자료_StudyPace.pptx
+++ b/docs/발표자료_StudyPace.pptx
@@ -125,26 +125,26 @@
   <p:extLst>
     <p:ext uri="{521415D9-36F7-43E2-AB2F-B90AF26B5E84}">
       <p14:sectionLst xmlns:p14="http://schemas.microsoft.com/office/powerpoint/2010/main">
-        <p14:section name="시작" id="{3f905584-825d-2406-1c52-5de79e05c2e6}">
+        <p14:section name="시작" id="{b46b9bdf-cae9-f307-c6c9-72e5344f978b}">
           <p14:sldIdLst>
             <p14:sldId id="256"/>
             <p14:sldId id="257"/>
           </p14:sldIdLst>
         </p14:section>
-        <p14:section name="문제 정의" id="{6983ead2-4ba1-7413-48c9-15725bf0314e}">
+        <p14:section name="문제 정의" id="{0952d8ce-04cb-b4f6-aa2c-90b1236168ee}">
           <p14:sldIdLst>
             <p14:sldId id="258"/>
             <p14:sldId id="259"/>
             <p14:sldId id="260"/>
           </p14:sldIdLst>
         </p14:section>
-        <p14:section name="해결 방법" id="{a8085e0d-45c8-0b81-3cb2-2f11e165b8b1}">
+        <p14:section name="해결 방법" id="{f929af6e-bf44-c53f-dc56-fd266f880880}">
           <p14:sldIdLst>
             <p14:sldId id="261"/>
             <p14:sldId id="262"/>
           </p14:sldIdLst>
         </p14:section>
-        <p14:section name="AI 활용" id="{cdf57f3f-09e7-86d4-dfd0-2d90e81b4d35}">
+        <p14:section name="AI 활용" id="{b5ff4095-3a35-9276-dc41-b7dbe20d6ebb}">
           <p14:sldIdLst>
             <p14:sldId id="263"/>
             <p14:sldId id="264"/>
@@ -153,20 +153,20 @@
             <p14:sldId id="267"/>
           </p14:sldIdLst>
         </p14:section>
-        <p14:section name="기술 · 과정" id="{cdc149f3-430c-bcbb-4daf-2b873dc4224e}">
+        <p14:section name="기술 · 과정" id="{6a64e3e6-3126-1b5f-e955-ba790c7faba7}">
           <p14:sldIdLst>
             <p14:sldId id="268"/>
             <p14:sldId id="269"/>
           </p14:sldIdLst>
         </p14:section>
-        <p14:section name="피드백 · 개선" id="{bed62312-5d17-984a-b676-38f33d13b294}">
+        <p14:section name="피드백 · 개선" id="{edfb61b9-35dd-81cb-eb79-ac54d10678a2}">
           <p14:sldIdLst>
             <p14:sldId id="270"/>
             <p14:sldId id="271"/>
             <p14:sldId id="272"/>
           </p14:sldIdLst>
         </p14:section>
-        <p14:section name="마무리" id="{9b7b02b8-f93a-4644-2358-edd9237d79ea}">
+        <p14:section name="마무리" id="{804ffb1d-f112-5844-60bf-8f44cf13f258}">
           <p14:sldIdLst>
             <p14:sldId id="273"/>
             <p14:sldId id="274"/>
@@ -12810,7 +12810,7 @@
       </p:sp>
       <p:sp>
         <p:nvSpPr>
-          <p:cNvPr id="15" name="기능 (Must 38 · Should 25) 카드"/>
+          <p:cNvPr id="15" name="핵심 Must 기능 카드"/>
           <p:cNvSpPr/>
           <p:nvPr/>
         </p:nvSpPr>
@@ -12868,7 +12868,7 @@
                 <a:ea typeface="Malgun Gothic" pitchFamily="34" charset="-122"/>
                 <a:cs typeface="Malgun Gothic" pitchFamily="34" charset="-120"/>
               </a:rPr>
-              <a:t>69개</a:t>
+              <a:t>10개</a:t>
             </a:r>
             <a:endParaRPr lang="ko-KR" sz="3000" dirty="0"/>
           </a:p>
@@ -12907,7 +12907,7 @@
                 <a:ea typeface="Malgun Gothic" pitchFamily="34" charset="-122"/>
                 <a:cs typeface="Malgun Gothic" pitchFamily="34" charset="-120"/>
               </a:rPr>
-              <a:t>기능 (Must 38 · Should 25)</a:t>
+              <a:t>핵심 Must 기능</a:t>
             </a:r>
             <a:endParaRPr lang="ko-KR" sz="1200" dirty="0"/>
           </a:p>
